--- a/산출물/교재/PPTX/통합반_온라인/통합반_06일차.pptx
+++ b/산출물/교재/PPTX/통합반_온라인/통합반_06일차.pptx
@@ -643,7 +643,7 @@
           <a:lstStyle/>
           <a:p>
             <a:r>
-              <a:t>머리말의 이름과 설명은 역할이 다릅니다. 이름은 어떤 스킬인지를 구별하는 식별자예요. 설명은 어떤 일에 이 스킬이 필요한지를 판단할 단서입니다. 이름은 파일과 지침 목록을 서로 연결합니다. 화면처럼 소문자와 숫자, 하이픈을 쓰고 폴더 이름과 맞춥니다. HYD의 저장 검사는 길이를 64자 이내로 제한해요. 이 규칙을 외우는 것보다, 목록에서 고른 이름이 실제로 읽을 파일과 일치해야 한다는 이유를 이해하면 됩니다. 설명에는 언제 쓰고 무엇을 내는지를 함께 적습니다. 그냥 경보 처리라고만 적으면 쿨러 경보인지 정기 정비 경보인지 가리기 어렵죠. 쿨러 경보의 원인을 진단하고 냉각 조치 카드를 낸다고 쓰면, 맡길 일과 기대하는 결과가 함께 드러납니다. 스킬을 많이 갖춘 환경에서는 먼저 이런 짧은 이름과 설명을 보여 주고, 필요한 스킬의 본문을 나중에 읽는 방식을 쓸 수 있어요. 모든 지침을 매번 한꺼번에 읽으면 관련 없는 내용까지 들어오고, 지금 필요한 절차를 찾기 어려워지기 때문입니다. HYD에서는 그 전에 배정 과정이 하나 더 있습니다. 에이전트나 업무 단계에 지정된 스킬을 골라 작업 폴더에 넣고, 그 목록을 실행 지시문에 알려 줘요. 설명 한 줄을 적었다고 모든 에이전트가 자동으로 그 스킬을 찾아 쓰는 것은 아닙니다. 사용할 수 있게 배정하는 일과, 배정된 지침 중 지금 일에 맞는 것을 읽는 일을 구분해 두세요. [출처·낭독 제외] https://agentskills.io/client-implementation/adding-skills-support</a:t>
+              <a:t>머리말의 이름과 설명은 역할이 다릅니다. 이름은 어떤 스킬인지를 구별하는 식별자예요. 설명은 어떤 일에 이 스킬이 필요한지를 판단할 단서입니다. 이름은 파일과 지침 목록을 서로 연결합니다. 화면처럼 소문자와 숫자, 하이픈을 쓰고 폴더 이름과 맞춥니다. HYD의 저장 검사는 길이를 64자 이내로 제한해요. 이 규칙을 외우는 것보다, 목록에서 고른 이름이 실제로 읽을 파일과 일치해야 한다는 이유를 이해하면 됩니다. 설명에는 언제 쓰고 무엇을 내는지를 함께 적습니다. 그냥 경보 처리라고만 적으면 쿨러 경보인지 정기 정비 경보인지 가리기 어렵죠. 쿨러 경보의 원인을 진단하고 냉각 조치 카드를 낸다고 쓰면, 맡길 일과 기대하는 결과가 함께 드러납니다. 스킬을 많이 갖춘 환경에서는 먼저 이런 짧은 이름과 설명을 보여 주고, 필요한 스킬의 본문을 나중에 읽는 방식을 쓸 수 있어요. 모든 지침을 매번 한꺼번에 읽으면 관련 없는 내용까지 들어오고, 지금 필요한 절차를 찾기 어려워지기 때문입니다. HYD에서는 그 전에 배정 과정이 하나 더 있습니다. 에이전트나 업무 단계에 지정된 스킬을 골라 작업 폴더에 넣고, 그 목록을 실행 지시문에 알려 줘요. 설명 한 줄을 적었다고 모든 에이전트가 자동으로 그 스킬을 찾아 쓰는 것은 아닙니다. 사용할 수 있게 배정하는 일과, 배정된 지침 중 지금 일에 맞는 것을 읽는 일을 구분해 두세요.</a:t>
             </a:r>
           </a:p>
         </p:txBody>
@@ -1903,7 +1903,7 @@
           <a:lstStyle/>
           <a:p>
             <a:r>
-              <a:t>그 표준이 MCP, Model Context Protocol입니다. 화면 첫 줄의 정의를 볼게요. AI 애플리케이션이 외부의 도구와 데이터에 연결하는 방식을 하나로 정한 개방형 프로토콜이에요. 개방형이라는 말은, 누구나 이 규약에 맞춰 만들 수 있다는 뜻입니다. 그래서 서로 다른 곳에서 만든 애플리케이션과 서버도 공통 규약을 바탕으로 연결할 수 있습니다. 실제 연결에는 지원하는 규약의 판, 연결 방식, 필요한 기능과 인증 조건이 맞아야 해요. HYD에도 그런 예가 있어요. 지식 그래프 서버는 HYD가 만든 게 아니라, 바깥에 공개된 서버를 그대로 가져다 붙인 겁니다. 판단 엔진 서버와 업무 DB 서버는 HYD가 직접 만들었고요. 만든 곳은 달라도, 에이전트 쪽에서는 똑같은 방식으로 연결합니다. 둘째 줄은 메시지 형식이에요. MCP는 JSON-RPC 2.0이라는 형식으로 메시지를 주고받습니다. 원격으로 기능을 부르는 약속을 JSON으로 적은 형식이죠. 요청에는 부를 기능의 이름과 넘길 값이 담기고, 응답에는 결과나 오류가 담겨요. 셋째 줄은 비유입니다. 규격이 같은 단자를 떠올려 보세요. 만든 회사가 달라도 규격이 같으면 꽂히죠. 그런데 다른 점도 있어요. MCP는 연결한 다음에 쓸 수 있는 기능을 맞추고, 서버가 무엇을 내주는지 물어서 알아내는 절차가 있습니다. 이 절차가 뒤에서 볼 도구 목록의 발견이에요. [출처·낭독 제외] https://modelcontextprotocol.io/specification/2025-06-18/architecture</a:t>
+              <a:t>그 표준이 MCP, Model Context Protocol입니다. 화면 첫 줄의 정의를 볼게요. AI 애플리케이션이 외부의 도구와 데이터에 연결하는 방식을 하나로 정한 개방형 프로토콜이에요. 개방형이라는 말은, 누구나 이 규약에 맞춰 만들 수 있다는 뜻입니다. 그래서 서로 다른 곳에서 만든 애플리케이션과 서버도 공통 규약을 바탕으로 연결할 수 있습니다. 실제 연결에는 지원하는 규약의 판, 연결 방식, 필요한 기능과 인증 조건이 맞아야 해요. HYD에도 그런 예가 있어요. 지식 그래프 서버는 HYD가 만든 게 아니라, 바깥에 공개된 서버를 그대로 가져다 붙인 겁니다. 판단 엔진 서버와 업무 DB 서버는 HYD가 직접 만들었고요. 만든 곳은 달라도, 에이전트 쪽에서는 똑같은 방식으로 연결합니다. 둘째 줄은 메시지 형식이에요. MCP는 JSON-RPC 2.0이라는 형식으로 메시지를 주고받습니다. 원격으로 기능을 부르는 약속을 JSON으로 적은 형식이죠. 요청에는 부를 기능의 이름과 넘길 값이 담기고, 응답에는 결과나 오류가 담겨요. 셋째 줄은 비유입니다. 규격이 같은 단자를 떠올려 보세요. 만든 회사가 달라도 규격이 같으면 꽂히죠. 그런데 다른 점도 있어요. MCP는 연결한 다음에 쓸 수 있는 기능을 맞추고, 서버가 무엇을 내주는지 물어서 알아내는 절차가 있습니다. 이 절차가 뒤에서 볼 도구 목록의 발견이에요.</a:t>
             </a:r>
           </a:p>
         </p:txBody>
@@ -2043,7 +2043,7 @@
           <a:lstStyle/>
           <a:p>
             <a:r>
-              <a:t>그림으로 자리를 봤으니, 네 구성요소의 정의를 정리하고 HYD에서는 그 자리에 무엇이 있는지 짝지어 보겠습니다. 정의는 화면 가운데 칸의 첫 줄에, HYD의 대응은 둘째 줄에 적어 뒀어요. 첫 줄, 호스트는 모델을 가지고 사용자의 일을 수행하는 애플리케이션이고, 클라이언트를 만들고 관리합니다. HYD에서는 처리 건마다 띄워지는 에이전트 프로그램이 이 자리에 있어요. 모델을 부르고, 연결할 서버마다 클라이언트를 두는 쪽이죠. 이 실행 사례에서는 작업 폴더를 마련하고 프로그램을 띄우는 워커와, 그 안에서 모델과 MCP 연결을 관리하는 호스트를 구분합니다. 둘째 줄, 클라이언트입니다. HYD에서는 실행할 때마다 작업 폴더에 연결할 서버의 설정 파일이 놓이고요, 호스트가 거기 적힌 서버마다 클라이언트를 하나씩 둡니다. 그래서 그 에이전트에 연결한 서버 수만큼 생기는 거예요. 셋째 줄, 서버는 지식 그래프, 판단 엔진, 업무 DB 앞에 놓인 프로그램들입니다. 넷째 줄, 도구는 서버가 내주는, 호출할 수 있는 기능이에요. 이름과 설명과 입력 스키마를 갖고 있습니다. 원인 진단, 조치 후보 비교, 생산 오더 조회 같은 것들이죠. HYD에는 클라이언트를 가진 쪽이 하나 더 있어요. 포털의 도구 시험 화면입니다. 브라우저 화면의 요청을 받아 포털 백엔드가 MCP 클라이언트로 서버에 연결하고 목록과 결과를 가져옵니다. 실습에서 서버를 등록하고 시험해 볼 때 쓰는 곳이 바로 이 화면입니다. 서버는 도구 외에도 읽을 자료나 재사용할 프롬프트를 제공할 수 있습니다. 이번 HYD 사례에서는 호출 가능한 도구를 중심으로 보는 거예요. 그리고 모델과 호스트는 꼭 구별해 두세요. 모델은 무엇을 부를지 고르는 쪽이고, 호스트는 그 선택을 받아서 실제 연결을 관리하는 애플리케이션이에요. 이 구별은 뒤에서 안전 기준을 다룰 때 다시 씁니다. [출처·낭독 제외] https://modelcontextprotocol.io/specification/2025-06-18/architecture</a:t>
+              <a:t>그림으로 자리를 봤으니, 네 구성요소의 정의를 정리하고 HYD에서는 그 자리에 무엇이 있는지 짝지어 보겠습니다. 정의는 화면 가운데 칸의 첫 줄에, HYD의 대응은 둘째 줄에 적어 뒀어요. 첫 줄, 호스트는 모델을 가지고 사용자의 일을 수행하는 애플리케이션이고, 클라이언트를 만들고 관리합니다. HYD에서는 처리 건마다 띄워지는 에이전트 프로그램이 이 자리에 있어요. 모델을 부르고, 연결할 서버마다 클라이언트를 두는 쪽이죠. 이 실행 사례에서는 작업 폴더를 마련하고 프로그램을 띄우는 워커와, 그 안에서 모델과 MCP 연결을 관리하는 호스트를 구분합니다. 둘째 줄, 클라이언트입니다. HYD에서는 실행할 때마다 작업 폴더에 연결할 서버의 설정 파일이 놓이고요, 호스트가 거기 적힌 서버마다 클라이언트를 하나씩 둡니다. 그래서 그 에이전트에 연결한 서버 수만큼 생기는 거예요. 셋째 줄, 서버는 지식 그래프, 판단 엔진, 업무 DB 앞에 놓인 프로그램들입니다. 넷째 줄, 도구는 서버가 내주는, 호출할 수 있는 기능이에요. 이름과 설명과 입력 스키마를 갖고 있습니다. 원인 진단, 조치 후보 비교, 생산 오더 조회 같은 것들이죠. HYD에는 클라이언트를 가진 쪽이 하나 더 있어요. 포털의 도구 시험 화면입니다. 브라우저 화면의 요청을 받아 포털 백엔드가 MCP 클라이언트로 서버에 연결하고 목록과 결과를 가져옵니다. 실습에서 서버를 등록하고 시험해 볼 때 쓰는 곳이 바로 이 화면입니다. 서버는 도구 외에도 읽을 자료나 재사용할 프롬프트를 제공할 수 있습니다. 이번 HYD 사례에서는 호출 가능한 도구를 중심으로 보는 거예요. 그리고 모델과 호스트는 꼭 구별해 두세요. 모델은 무엇을 부를지 고르는 쪽이고, 호스트는 그 선택을 받아서 실제 연결을 관리하는 애플리케이션이에요. 이 구별은 뒤에서 안전 기준을 다룰 때 다시 씁니다.</a:t>
             </a:r>
           </a:p>
         </p:txBody>
@@ -2323,7 +2323,7 @@
           <a:lstStyle/>
           <a:p>
             <a:r>
-              <a:t>도구를 쓰기까지의 과정을 왼쪽부터 세 단계로 보겠습니다. 첫째는 연결을 시작하는 초기화, 둘째는 도구를 알아보는 발견, 셋째는 실제로 도구를 부르는 호출입니다. 각 단계에서 클라이언트와 서버가 주고받는 내용이 달라요. 첫 단계에서는 초기화 요청을 주고받으며 규약의 판과 지원 기능을 확인합니다. 서버가 도구를 제공하는지도 이때 알려 줘요. 초기화가 끝났다는 알림까지 보내면 정상적인 요청을 주고받을 준비가 됩니다. 서로 지원하는 규약 판이 맞아야 그다음 요청을 주고받을 수 있는 거죠. 그다음은 도구 목록 요청입니다. 이름과 설명, 입력 스키마를 받아 어떤 기능에 무엇을 넘겨야 하는지 알아봅니다. 목록이 크면 나눠 받아 이어 읽을 수도 있어요. 여기서는 도구 목록을 요청하는 표준 이름인 tools/list를 함께 기억해 두면 됩니다. 필요한 도구를 고른 다음에는 도구 이름과 입력 값을 담아 호출합니다. 이때의 표준 이름이 tools/call이에요. 목록을 알아보는 요청과 업무 기능을 실행하는 요청이 서로 다릅니다. HYD 포털의 연결 검사는 초기화하고 목록을 실제로 받아 보는 데까지 합니다. 그래서 통과했다는 말은 그 설정으로 대화하고 목록을 읽었다는 뜻이에요. 특정 도구에 업무 입력을 넣었을 때 성공하는지, 결과가 업무상 옳은지는 다음 호출에서 확인해야 합니다. 목록 조회가 모든 호출 직전의 필수 규칙인 것은 아니지만, 지금 사용할 도구의 이름과 입력 형식을 아는 데 필요한 발견 과정입니다. [출처·낭독 제외] https://modelcontextprotocol.io/specification/2025-06-18/basic/lifecycle</a:t>
+              <a:t>도구를 쓰기까지의 과정을 왼쪽부터 세 단계로 보겠습니다. 첫째는 연결을 시작하는 초기화, 둘째는 도구를 알아보는 발견, 셋째는 실제로 도구를 부르는 호출입니다. 각 단계에서 클라이언트와 서버가 주고받는 내용이 달라요. 첫 단계에서는 초기화 요청을 주고받으며 규약의 판과 지원 기능을 확인합니다. 서버가 도구를 제공하는지도 이때 알려 줘요. 초기화가 끝났다는 알림까지 보내면 정상적인 요청을 주고받을 준비가 됩니다. 서로 지원하는 규약 판이 맞아야 그다음 요청을 주고받을 수 있는 거죠. 그다음은 도구 목록 요청입니다. 이름과 설명, 입력 스키마를 받아 어떤 기능에 무엇을 넘겨야 하는지 알아봅니다. 목록이 크면 나눠 받아 이어 읽을 수도 있어요. 여기서는 도구 목록을 요청하는 표준 이름인 tools/list를 함께 기억해 두면 됩니다. 필요한 도구를 고른 다음에는 도구 이름과 입력 값을 담아 호출합니다. 이때의 표준 이름이 tools/call이에요. 목록을 알아보는 요청과 업무 기능을 실행하는 요청이 서로 다릅니다. HYD 포털의 연결 검사는 초기화하고 목록을 실제로 받아 보는 데까지 합니다. 그래서 통과했다는 말은 그 설정으로 대화하고 목록을 읽었다는 뜻이에요. 특정 도구에 업무 입력을 넣었을 때 성공하는지, 결과가 업무상 옳은지는 다음 호출에서 확인해야 합니다. 목록 조회가 모든 호출 직전의 필수 규칙인 것은 아니지만, 지금 사용할 도구의 이름과 입력 형식을 아는 데 필요한 발견 과정입니다.</a:t>
             </a:r>
           </a:p>
         </p:txBody>
@@ -2393,7 +2393,7 @@
           <a:lstStyle/>
           <a:p>
             <a:r>
-              <a:t>그런데 굳이 연결할 때마다 서버에 목록을 물어야 할까요? 호스트에 도구를 미리 적어 두면 더 간단해 보이는데 말이죠. 왼쪽처럼 도구를 호스트에 미리 적어 두면 어떻게 될까요? 서버의 도구가 바뀔 때마다 호스트도 고쳐야 합니다. 고치는 걸 잊으면 적어 둔 내용과 실제 서버가 어긋나고요. 오른쪽처럼 연결할 때 서버에 물으면, 서버가 지금 내주는 도구를 그대로 받아요. 이름과 설명과 입력 스키마가 목록에 함께 오니까, 도구 정보를 호스트 코드에 일일이 옮겨 적는 수고를 줄일 수 있습니다. 실제 예가 있어요. 판단 엔진 서버에는 나중에 구매 판단을 위한 도구 셋이 더해졌습니다. 그래도 에이전트 쪽 설정은 서버 주소 그대로예요. 연결할 때마다 새 목록을 받아 오니까요. 포털의 도구 시험 화면도 같은 생각을 따릅니다. 도구를 부르기 직전에 서버에서 목록을 다시 받아서, 서버가 지금 내주는 그대로를 기준으로 삼아요. 목록이 바뀌면 새 기능이 생긴 것을 알아볼 수 있죠. 다만 이름이 보인다고 바로 허용되는 것은 아닙니다. 지원하지 않는 기능이 있거나 권한 범위가 바뀌면 설정과 허용 목록도 검토해야 해요. [출처·낭독 제외] https://modelcontextprotocol.io/specification/2025-06-18/server/tools</a:t>
+              <a:t>그런데 굳이 연결할 때마다 서버에 목록을 물어야 할까요? 호스트에 도구를 미리 적어 두면 더 간단해 보이는데 말이죠. 왼쪽처럼 도구를 호스트에 미리 적어 두면 어떻게 될까요? 서버의 도구가 바뀔 때마다 호스트도 고쳐야 합니다. 고치는 걸 잊으면 적어 둔 내용과 실제 서버가 어긋나고요. 오른쪽처럼 연결할 때 서버에 물으면, 서버가 지금 내주는 도구를 그대로 받아요. 이름과 설명과 입력 스키마가 목록에 함께 오니까, 도구 정보를 호스트 코드에 일일이 옮겨 적는 수고를 줄일 수 있습니다. 실제 예가 있어요. 판단 엔진 서버에는 나중에 구매 판단을 위한 도구 셋이 더해졌습니다. 그래도 에이전트 쪽 설정은 서버 주소 그대로예요. 연결할 때마다 새 목록을 받아 오니까요. 포털의 도구 시험 화면도 같은 생각을 따릅니다. 도구를 부르기 직전에 서버에서 목록을 다시 받아서, 서버가 지금 내주는 그대로를 기준으로 삼아요. 목록이 바뀌면 새 기능이 생긴 것을 알아볼 수 있죠. 다만 이름이 보인다고 바로 허용되는 것은 아닙니다. 지원하지 않는 기능이 있거나 권한 범위가 바뀌면 설정과 허용 목록도 검토해야 해요.</a:t>
             </a:r>
           </a:p>
         </p:txBody>
@@ -2463,7 +2463,7 @@
           <a:lstStyle/>
           <a:p>
             <a:r>
-              <a:t>그 목록에 든 항목 하나를 그대로 옮겨 왔습니다. 화면 왼쪽이에요. 구매 쪽 업무 DB 서버가 내주는 부품 견적 조회 도구입니다. 맨 위가 도구의 이름이에요. 호출할 때 이 이름을 씁니다. 그 아래가 설명이고요. 부품별로 공급사의 단가, 불량률, 납기, 승인 여부를 읽는다고 적혀 있죠. 가운데 입력 스키마는 넘길 값을 정합니다. 부품 번호 하나를 글자로 받고, 생략하면 이 서버 구현에서는 펌프 축 씰 키트를 기본으로 씁니다. 값의 이름과 형, 그리고 비웠을 때 쓸 값까지 적혀 있으니, 모델이 무엇을 어떤 모양으로 넣을지 판단할 단서가 됩니다. 이 정의는 JSON Schema라는 표준 형식으로 적습니다. 스키마의 기본값 표시는 안내이고, 검사기가 빠진 값을 자동으로 채운다는 뜻은 아니에요. 실제 기본값 처리는 이 도구의 구현에서 합니다. 맨 아래에는 이 도구가 읽기만 한다는 표시가 붙어 있어요. 오른쪽에서 강조한 게 설명이죠. 모델이 이 도구를 부를지 말지 정할 때 읽는 게 바로 이 설명과 입력 스키마거든요. 그러니까 도구의 설명은 사람을 위한 주석에 그치지 않습니다. 설명이 모호하면 모델이 엉뚱한 도구를 고르거나, 필요한 도구를 그냥 지나쳐요. 스킬의 설명이 스킬을 고르는 기준이었던 것처럼, 도구의 설명은 도구를 고르는 기준입니다. [출처·낭독 제외] https://json-schema.org/understanding-json-schema/reference/annotations</a:t>
+              <a:t>그 목록에 든 항목 하나를 그대로 옮겨 왔습니다. 화면 왼쪽이에요. 구매 쪽 업무 DB 서버가 내주는 부품 견적 조회 도구입니다. 맨 위가 도구의 이름이에요. 호출할 때 이 이름을 씁니다. 그 아래가 설명이고요. 부품별로 공급사의 단가, 불량률, 납기, 승인 여부를 읽는다고 적혀 있죠. 가운데 입력 스키마는 넘길 값을 정합니다. 부품 번호 하나를 글자로 받고, 생략하면 이 서버 구현에서는 펌프 축 씰 키트를 기본으로 씁니다. 값의 이름과 형, 그리고 비웠을 때 쓸 값까지 적혀 있으니, 모델이 무엇을 어떤 모양으로 넣을지 판단할 단서가 됩니다. 이 정의는 JSON Schema라는 표준 형식으로 적습니다. 스키마의 기본값 표시는 안내이고, 검사기가 빠진 값을 자동으로 채운다는 뜻은 아니에요. 실제 기본값 처리는 이 도구의 구현에서 합니다. 맨 아래에는 이 도구가 읽기만 한다는 표시가 붙어 있어요. 오른쪽에서 강조한 게 설명이죠. 모델이 이 도구를 부를지 말지 정할 때 읽는 게 바로 이 설명과 입력 스키마거든요. 그러니까 도구의 설명은 사람을 위한 주석에 그치지 않습니다. 설명이 모호하면 모델이 엉뚱한 도구를 고르거나, 필요한 도구를 그냥 지나쳐요. 스킬의 설명이 스킬을 고르는 기준이었던 것처럼, 도구의 설명은 도구를 고르는 기준입니다.</a:t>
             </a:r>
           </a:p>
         </p:txBody>
@@ -2533,7 +2533,7 @@
           <a:lstStyle/>
           <a:p>
             <a:r>
-              <a:t>도구를 실제로 부를 때는 어떤 요청이 갈까요? 둘째 쿨러 경보의 실행 기록에서, 원인 진단을 부른 요청을 원래 모양 그대로 꺼냈어요. 첫 줄이 도구의 전체 이름입니다. 앞에 MCP 표시, 가운데에 서버 이름, 끝에 도구 이름이 있고, 이 실행 도구에서는 밑줄 두 개로 이어 표시했어요. MCP가 모든 제품에 이 이름 모양을 요구하는 것은 아닙니다. 판단 엔진 서버의 원인 진단 도구라는 뜻이죠. 그 아래가 입력입니다. 원인 진단 도구도 앞의 부품 견적 도구처럼 입력 스키마를 갖고 있고, 거기 정해 둔 항목이 설비, 경보의 종류, 경보 번호 셋이에요. 그 세 항목을 이름과 형에 맞춰 채운 JSON입니다. 앞에서 스킬의 한 줄에 이름이 셋 들어 있었죠. 서버 이름, 도구 이름, 넘길 값. 실제 요청에서는 앞의 두 이름이 전체 이름 하나로 합쳐지고, 넘길 값은 입력 JSON이 된 겁니다. 전체 이름에 서버 이름을 붙이는 데는 까닭이 있습니다. 같은 이름의 도구가 두 서버에 있을 수 있거든요. 앞에서 본 부품 견적 도구가 그래요. 업무 DB 전체 서버에도 있고, 구매 쪽 서버에도 있습니다. 앞에 서버 이름이 붙어 있으니 어느 서버의 것인지 헷갈리지 않죠. 그리고 입력 스키마는 넘길 값의 모양을 정한 계약이기도 합니다. 포털에서 도구를 시험해 볼 때, 입력이 스키마를 어기면 서버에 보내기도 전에 거절해요. 설비 칸에 숫자를 넣었거나 필요한 항목을 빠뜨린 요청은 서버까지 가지 않습니다. 형식이 맞지 않는 요청을 먼저 걸러 주는 겁니다. 하지만 문자열이라는 형식이 맞아도 다른 설비의 번호를 넣을 수 있죠. 스키마 검사를 통과한 것과 업무 대상을 정확히 고른 것은 따로 확인해야 합니다. [출처·낭독 제외] it/process/procsvc/mcp_check.py:_argument_problem</a:t>
+              <a:t>도구를 실제로 부를 때는 어떤 요청이 갈까요? 둘째 쿨러 경보의 실행 기록에서, 원인 진단을 부른 요청을 원래 모양 그대로 꺼냈어요. 첫 줄이 도구의 전체 이름입니다. 앞에 MCP 표시, 가운데에 서버 이름, 끝에 도구 이름이 있고, 이 실행 도구에서는 밑줄 두 개로 이어 표시했어요. MCP가 모든 제품에 이 이름 모양을 요구하는 것은 아닙니다. 판단 엔진 서버의 원인 진단 도구라는 뜻이죠. 그 아래가 입력입니다. 원인 진단 도구도 앞의 부품 견적 도구처럼 입력 스키마를 갖고 있고, 거기 정해 둔 항목이 설비, 경보의 종류, 경보 번호 셋이에요. 그 세 항목을 이름과 형에 맞춰 채운 JSON입니다. 앞에서 스킬의 한 줄에 이름이 셋 들어 있었죠. 서버 이름, 도구 이름, 넘길 값. 실제 요청에서는 앞의 두 이름이 전체 이름 하나로 합쳐지고, 넘길 값은 입력 JSON이 된 겁니다. 전체 이름에 서버 이름을 붙이는 데는 까닭이 있습니다. 같은 이름의 도구가 두 서버에 있을 수 있거든요. 앞에서 본 부품 견적 도구가 그래요. 업무 DB 전체 서버에도 있고, 구매 쪽 서버에도 있습니다. 앞에 서버 이름이 붙어 있으니 어느 서버의 것인지 헷갈리지 않죠. 그리고 입력 스키마는 넘길 값의 모양을 정한 계약이기도 합니다. 포털에서 도구를 시험해 볼 때, 입력이 스키마를 어기면 서버에 보내기도 전에 거절해요. 설비 칸에 숫자를 넣었거나 필요한 항목을 빠뜨린 요청은 서버까지 가지 않습니다. 형식이 맞지 않는 요청을 먼저 걸러 주는 겁니다. 하지만 문자열이라는 형식이 맞아도 다른 설비의 번호를 넣을 수 있죠. 스키마 검사를 통과한 것과 업무 대상을 정확히 고른 것은 따로 확인해야 합니다.</a:t>
             </a:r>
           </a:p>
         </p:txBody>
@@ -2603,7 +2603,7 @@
           <a:lstStyle/>
           <a:p>
             <a:r>
-              <a:t>이번에는 생산 오더 조회에서 돌아온 내용입니다. 화면은 HYD의 업무 DB 도구가 만든 업무 결과 본문이에요. 앞서 본 호출 이름의 모양처럼, 이 항목 이름도 HYD 사례와 MCP 공통 규약을 구분해서 읽어야 합니다. 맨 위 성공 표시는 이 업무 조회를 처리했다는 뜻입니다. 그 아래에는 어느 업무 시스템에서 가져왔는지와 기준 시각이 있어요. 판단용 값에는 오더 번호, 납기까지 남은 시간, 남은 수량이 들어 있고, 원래 행에는 그 값을 다시 확인할 자료가 담깁니다. 모든 서버가 이 항목 이름을 쓰는 것은 아닙니다. 바깥 MCP 응답도 함께 생각해 볼게요. 요청 자체를 처리하지 못한 프로토콜 오류가 있고, 요청은 전달됐지만 도구 실행에 실패해 오류 표시가 담긴 결과가 올 수도 있습니다. 그러니 결과가 돌아왔다는 사실만으로 업무가 성공했다고 판단하면 안 돼요. 포털 구현도 연결·프로토콜 상태와 도구 오류 표시를 따로 다룹니다. 업무 결과를 얻은 뒤에도 확인은 남습니다. 어느 설비의 어떤 조건을 조회했는지, 기록의 기준 시각이 판단에 충분히 가까운지 봐야 하죠. 성공 표시는 이번 요청의 처리 상태를 알려 줍니다. 답이 실제 업무 판단에 맞는지는 대상과 시각과 근거를 함께 대조해서 정합니다. [출처·낭독 제외] https://modelcontextprotocol.io/specification/2025-06-18/server/tools</a:t>
+              <a:t>이번에는 생산 오더 조회에서 돌아온 내용입니다. 화면은 HYD의 업무 DB 도구가 만든 업무 결과 본문이에요. 앞서 본 호출 이름의 모양처럼, 이 항목 이름도 HYD 사례와 MCP 공통 규약을 구분해서 읽어야 합니다. 맨 위 성공 표시는 이 업무 조회를 처리했다는 뜻입니다. 그 아래에는 어느 업무 시스템에서 가져왔는지와 기준 시각이 있어요. 판단용 값에는 오더 번호, 납기까지 남은 시간, 남은 수량이 들어 있고, 원래 행에는 그 값을 다시 확인할 자료가 담깁니다. 모든 서버가 이 항목 이름을 쓰는 것은 아닙니다. 바깥 MCP 응답도 함께 생각해 볼게요. 요청 자체를 처리하지 못한 프로토콜 오류가 있고, 요청은 전달됐지만 도구 실행에 실패해 오류 표시가 담긴 결과가 올 수도 있습니다. 그러니 결과가 돌아왔다는 사실만으로 업무가 성공했다고 판단하면 안 돼요. 포털 구현도 연결·프로토콜 상태와 도구 오류 표시를 따로 다룹니다. 업무 결과를 얻은 뒤에도 확인은 남습니다. 어느 설비의 어떤 조건을 조회했는지, 기록의 기준 시각이 판단에 충분히 가까운지 봐야 하죠. 성공 표시는 이번 요청의 처리 상태를 알려 줍니다. 답이 실제 업무 판단에 맞는지는 대상과 시각과 근거를 함께 대조해서 정합니다.</a:t>
             </a:r>
           </a:p>
         </p:txBody>
@@ -2743,7 +2743,7 @@
           <a:lstStyle/>
           <a:p>
             <a:r>
-              <a:t>메시지가 오가는 모양은 봤으니, 남은 건 클라이언트와 서버를 잇는 길입니다. 여기서는 표준 전송 방식 두 가지를 보겠습니다. 화면 왼쪽이 stdio, 오른쪽이 Streamable HTTP예요. stdio는 표준 입력과 표준 출력을 뜻합니다. 호스트가 서버 프로그램을 자기 아래 하위 프로세스로 직접 띄워요. 그리고 그 프로세스의 표준 입력으로 요청을 넣고, 표준 출력으로 응답을 받습니다. 왼쪽 아래 적힌 것처럼, 서버가 이를 띄운 클라이언트와 같은 실행 환경에서 돌아요. 그 서버가 접속하는 DB까지 같은 PC에 있어야 한다는 뜻은 아닙니다. Streamable HTTP는 서버가 먼저 떠 있는 방식입니다. 클라이언트가 그 서버의 주소로 접속해서, HTTP 요청으로 메시지를 주고받아요. 그래서 오른쪽 그림처럼 여러 클라이언트가 한 서버를 함께 쓸 수 있습니다. 어느 쪽을 고를지는 서버를 어디에 두고 누가 쓰느냐에 달려 있어요. 내 PC에서 나만 쓰는 도구라면 stdio가 간단하고요, 여러 에이전트가 함께 쓰는 공용 서버에는 HTTP 방식을 사용할 수 있습니다. HTTP 서버를 같은 PC에서 실행하는 구성도 가능해요. 어느 방식이든 실제 데이터 접근 권한은 별도로 정합니다. HYD는 두 방식을 다 써요. 다섯 서버 가운데 지식 그래프 서버 하나만 stdio이고, 나머지 넷은 미리 떠 있는 HTTP 서버입니다. [출처·낭독 제외] https://modelcontextprotocol.io/specification/2025-06-18/basic/transports</a:t>
+              <a:t>메시지가 오가는 모양은 봤으니, 남은 건 클라이언트와 서버를 잇는 길입니다. 여기서는 표준 전송 방식 두 가지를 보겠습니다. 화면 왼쪽이 stdio, 오른쪽이 Streamable HTTP예요. stdio는 표준 입력과 표준 출력을 뜻합니다. 호스트가 서버 프로그램을 자기 아래 하위 프로세스로 직접 띄워요. 그리고 그 프로세스의 표준 입력으로 요청을 넣고, 표준 출력으로 응답을 받습니다. 왼쪽 아래 적힌 것처럼, 서버가 이를 띄운 클라이언트와 같은 실행 환경에서 돌아요. 그 서버가 접속하는 DB까지 같은 PC에 있어야 한다는 뜻은 아닙니다. Streamable HTTP는 서버가 먼저 떠 있는 방식입니다. 클라이언트가 그 서버의 주소로 접속해서, HTTP 요청으로 메시지를 주고받아요. 그래서 오른쪽 그림처럼 여러 클라이언트가 한 서버를 함께 쓸 수 있습니다. 어느 쪽을 고를지는 서버를 어디에 두고 누가 쓰느냐에 달려 있어요. 내 PC에서 나만 쓰는 도구라면 stdio가 간단하고요, 여러 에이전트가 함께 쓰는 공용 서버에는 HTTP 방식을 사용할 수 있습니다. HTTP 서버를 같은 PC에서 실행하는 구성도 가능해요. 어느 방식이든 실제 데이터 접근 권한은 별도로 정합니다. HYD는 두 방식을 다 써요. 다섯 서버 가운데 지식 그래프 서버 하나만 stdio이고, 나머지 넷은 미리 떠 있는 HTTP 서버입니다.</a:t>
             </a:r>
           </a:p>
         </p:txBody>
@@ -3303,7 +3303,7 @@
           <a:lstStyle/>
           <a:p>
             <a:r>
-              <a:t>도구를 연결할 때는 어떤 데이터를 읽는지와 무엇을 바꾸는지를 먼저 봅니다. 화면 왼쪽은 읽는 도구, 오른쪽은 쓰는 도구예요. 생산 오더 조회는 업무 기록을 바꾸지 않고 값을 가져옵니다. 그렇다고 잘못 불러도 아무 영향이 없는 것은 아니에요. 읽을 필요가 없는 다른 부서의 계약이나 개인정보를 가져오면 정보가 노출될 수 있습니다. 또 잘못된 설비의 값을 받아 판단에 쓰면 이후의 추천도 틀어집니다. 읽기에서도 대상과 범위를 제한해야 하는 이유입니다. 메일 발송처럼 쓰는 도구는 시스템을 바꾸거나 외부에 결과를 남깁니다. 이미 보낸 메일은 요청을 취소한다고 상대의 받은편지함에서 사라지지 않죠. 어떤 변경인지, 누가 허락하는지, 중복 호출을 어떻게 다룰지까지 확인해야 합니다. 이 구분은 도구가 미치는 영향을 살펴보는 출발점입니다. 읽기인지 쓰기인지 표시를 확인하고, 실제 구현과 접근 계정이 그 범위에 맞는지도 봐야 해요. 다음 장에서는 서버가 이 성격을 어떤 표시로 알려 주는지 보겠습니다. [출처·낭독 제외] https://modelcontextprotocol.io/docs/2025-11-25/tutorials/security/security_best_practices</a:t>
+              <a:t>도구를 연결할 때는 어떤 데이터를 읽는지와 무엇을 바꾸는지를 먼저 봅니다. 화면 왼쪽은 읽는 도구, 오른쪽은 쓰는 도구예요. 생산 오더 조회는 업무 기록을 바꾸지 않고 값을 가져옵니다. 그렇다고 잘못 불러도 아무 영향이 없는 것은 아니에요. 읽을 필요가 없는 다른 부서의 계약이나 개인정보를 가져오면 정보가 노출될 수 있습니다. 또 잘못된 설비의 값을 받아 판단에 쓰면 이후의 추천도 틀어집니다. 읽기에서도 대상과 범위를 제한해야 하는 이유입니다. 메일 발송처럼 쓰는 도구는 시스템을 바꾸거나 외부에 결과를 남깁니다. 이미 보낸 메일은 요청을 취소한다고 상대의 받은편지함에서 사라지지 않죠. 어떤 변경인지, 누가 허락하는지, 중복 호출을 어떻게 다룰지까지 확인해야 합니다. 이 구분은 도구가 미치는 영향을 살펴보는 출발점입니다. 읽기인지 쓰기인지 표시를 확인하고, 실제 구현과 접근 계정이 그 범위에 맞는지도 봐야 해요. 다음 장에서는 서버가 이 성격을 어떤 표시로 알려 주는지 보겠습니다.</a:t>
             </a:r>
           </a:p>
         </p:txBody>
@@ -3373,7 +3373,7 @@
           <a:lstStyle/>
           <a:p>
             <a:r>
-              <a:t>그럼 어떤 도구가 읽는 도구인지는 어떻게 알까요? MCP에는 도구 정의에 붙이는 표시가 있습니다. 화면 첫 줄의 readOnlyHint, 읽기 전용 표시예요. 이 표시는 도구 정의의 주석 칸에 붙고, true면 시스템을 바꾸지 않는 도구라는 뜻입니다. 앞에서 본 부품 견적 도구에도 붙어 있었죠. 둘째 줄을 보세요. 판단 엔진 서버는 판단을 제출하는 두 도구만 빼고 모두 true예요. 그 두 도구가 false인데, 하나는 조치 추천안을, 하나는 구매 추천안을 제출하죠. 셋째 줄, 업무 DB 서버의 도구는 모두 true고요. 그런데 넷째 줄이 중요합니다. 이 표시는 이름 그대로 힌트예요. 서버가 스스로 적은 값이라서, 서버를 만든 사람이 잘못 적을 수도 있고 일부러 속일 수도 있습니다. 그래서 HYD 포털은 표시와 함께 도구 이름까지 한 번 더 검사합니다. 표시는 true인데 이름이 쓰기나 삭제를 뜻하면, 읽는 도구로 자동 인정하지 않습니다. 다만 이름 검사도 잘못된 구현이나 거짓 표시를 모두 밝혀 내는 증명은 아니에요. 판단 엔진 서버의 판단 제출 도구는 아예 표시부터 false죠. 그래서 포털의 시험 화면에서는 부를 수 없고, 처리 건 안의 에이전트만 부릅니다. 읽기 도구 쪽도 표시에만 기대지 않습니다. 넷째 줄 끝에 적은 것처럼, 업무 DB와 시계열 DB를 읽는 서버는 뒤에서 읽기 전용으로 접속해요. 그러니까 표시는 도구를 고르는 기준이고, 실제로 읽기만 하게 막는 일은 서버 뒤의 장치가 함께 맡는 거예요. [출처·낭독 제외] https://modelcontextprotocol.io/specification/2025-06-18/server/tools</a:t>
+              <a:t>그럼 어떤 도구가 읽는 도구인지는 어떻게 알까요? MCP에는 도구 정의에 붙이는 표시가 있습니다. 화면 첫 줄의 readOnlyHint, 읽기 전용 표시예요. 이 표시는 도구 정의의 주석 칸에 붙고, true면 시스템을 바꾸지 않는 도구라는 뜻입니다. 앞에서 본 부품 견적 도구에도 붙어 있었죠. 둘째 줄을 보세요. 판단 엔진 서버는 판단을 제출하는 두 도구만 빼고 모두 true예요. 그 두 도구가 false인데, 하나는 조치 추천안을, 하나는 구매 추천안을 제출하죠. 셋째 줄, 업무 DB 서버의 도구는 모두 true고요. 그런데 넷째 줄이 중요합니다. 이 표시는 이름 그대로 힌트예요. 서버가 스스로 적은 값이라서, 서버를 만든 사람이 잘못 적을 수도 있고 일부러 속일 수도 있습니다. 그래서 HYD 포털은 표시와 함께 도구 이름까지 한 번 더 검사합니다. 표시는 true인데 이름이 쓰기나 삭제를 뜻하면, 읽는 도구로 자동 인정하지 않습니다. 다만 이름 검사도 잘못된 구현이나 거짓 표시를 모두 밝혀 내는 증명은 아니에요. 판단 엔진 서버의 판단 제출 도구는 아예 표시부터 false죠. 그래서 포털의 시험 화면에서는 부를 수 없고, 처리 건 안의 에이전트만 부릅니다. 읽기 도구 쪽도 표시에만 기대지 않습니다. 넷째 줄 끝에 적은 것처럼, 업무 DB와 시계열 DB를 읽는 서버는 뒤에서 읽기 전용으로 접속해요. 그러니까 표시는 도구를 고르는 기준이고, 실제로 읽기만 하게 막는 일은 서버 뒤의 장치가 함께 맡는 거예요.</a:t>
             </a:r>
           </a:p>
         </p:txBody>
@@ -4143,7 +4143,7 @@
           <a:lstStyle/>
           <a:p>
             <a:r>
-              <a:t>응답이 기대와 다를 때 결과에 어떻게 적어야 하는지, 표에 네 경우로 정리했습니다. 위의 두 줄은 멈춤 조건에서 이미 구분한 거예요. 정상 조회에서 0행이면 그 조건에 맞는 행을 찾지 못했다고 적습니다. 재고 수량이 0이라는 뜻은 아니에요. 호출 실패나 도구 오류가 확인됐다면 사유를 적고, 0이나 빈 값으로 바꾸지 않습니다. 도구를 연결해서 쓰면 경우가 둘 더 생깁니다. 강조된 셋째 줄이 정해진 시간 안에 응답하지 못한 경우예요. 연결 검사에서 본 시간 초과가, 도구를 부를 때도 생기는 거죠. 업무 DB 조회처럼 시간 제한이 걸린 호출은, 시간을 넘기면 실패로 돌아옵니다. 이때 확인되는 것은 제한 시간 안에 결과를 받지 못했다는 사실입니다. 서버가 작업을 전혀 하지 않았다고 단정할 수는 없어요. 특히 변경을 남기는 도구라면 재시도 전에 처리 상태와 중복 방지 여부부터 확인해야 합니다. 넷째 줄은 응답이 잘린 경우입니다. 본문의 일부만 오거나 아예 전달되지 않으면, 읽지 못한 범위를 밝혀요. 포털의 도구 시험 화면도 같은 원칙을 따릅니다. 결과가 정해진 길이를 넘으면 잘라서 보여 주되, 잘렸다는 표시와 원래 크기를 같이 알려 줘요. 네 경우 모두 지키는 원칙은 하나예요. 모르는 걸 아는 것처럼 적지 않는다. 시간을 넘긴 조회를 0으로 적으면 어떻게 될까요? 모르는 재고가 없는 재고로 바뀌고, 잘못된 발주로 이어질 수 있습니다. [출처·낭독 제외] https://modelcontextprotocol.io/specification/2025-06-18/basic/lifecycle</a:t>
+              <a:t>응답이 기대와 다를 때 결과에 어떻게 적어야 하는지, 표에 네 경우로 정리했습니다. 위의 두 줄은 멈춤 조건에서 이미 구분한 거예요. 정상 조회에서 0행이면 그 조건에 맞는 행을 찾지 못했다고 적습니다. 재고 수량이 0이라는 뜻은 아니에요. 호출 실패나 도구 오류가 확인됐다면 사유를 적고, 0이나 빈 값으로 바꾸지 않습니다. 도구를 연결해서 쓰면 경우가 둘 더 생깁니다. 강조된 셋째 줄이 정해진 시간 안에 응답하지 못한 경우예요. 연결 검사에서 본 시간 초과가, 도구를 부를 때도 생기는 거죠. 업무 DB 조회처럼 시간 제한이 걸린 호출은, 시간을 넘기면 실패로 돌아옵니다. 이때 확인되는 것은 제한 시간 안에 결과를 받지 못했다는 사실입니다. 서버가 작업을 전혀 하지 않았다고 단정할 수는 없어요. 특히 변경을 남기는 도구라면 재시도 전에 처리 상태와 중복 방지 여부부터 확인해야 합니다. 넷째 줄은 응답이 잘린 경우입니다. 본문의 일부만 오거나 아예 전달되지 않으면, 읽지 못한 범위를 밝혀요. 포털의 도구 시험 화면도 같은 원칙을 따릅니다. 결과가 정해진 길이를 넘으면 잘라서 보여 주되, 잘렸다는 표시와 원래 크기를 같이 알려 줘요. 네 경우 모두 지키는 원칙은 하나예요. 모르는 걸 아는 것처럼 적지 않는다. 시간을 넘긴 조회를 0으로 적으면 어떻게 될까요? 모르는 재고가 없는 재고로 바뀌고, 잘못된 발주로 이어질 수 있습니다.</a:t>
             </a:r>
           </a:p>
         </p:txBody>
@@ -4353,7 +4353,7 @@
           <a:lstStyle/>
           <a:p>
             <a:r>
-              <a:t>두 번째 실습은 여러 서버를 조합하는 활동입니다. 첫 실습에서 확인할 포털의 연결 검사와 비교해 보면 차이가 드러납니다. 두 번째 실습에서는 자리를 내 PC의 개발 환경으로 옮겨서, 서로 다른 MCP 서버 여러 개를 연결하고 조합해 봅니다. 이번 실습은 바이브 코딩으로 진행해요. 미리 준비된 파일시스템, Git, 시간 서버를 각각 연결하고, 서버마다 실행 방법과 접근 권한을 정합니다. 연결한 다음에는 서버마다 도구 목록과 호출 결과가 어떻게 다른지 견줘 보세요. 그리고 파일을 읽고, Git의 변경 기록을 확인하고, 시간 정보를 확인하는 일을 한 요청으로 이어서 불러요. 그 조합 결과가 이 실습에서 남는 산출물입니다. 성공 기준은 연결 방식의 차이를 설명하는 거예요. HYD 포털에는 방금 배운 등록·검사 절차가 있습니다. 로컬 코딩 도구에서는 해당 도구가 제공하는 서버 설정과 실행 권한을 확인해야 합니다. 이 차이를 설명할 수 있으면 됩니다. 서버별 결과가 한 요청 안에서 어떻게 사용됐는지도 호출 기록으로 남겨 주세요.</a:t>
+              <a:t>두 번째 실습은 여러 서버를 조합하는 활동입니다. 첫 실습에서 확인할 포털의 연결 검사와 비교해 보면 차이가 드러납니다. 두 번째 실습에서는 자리를 내 PC의 개발 환경으로 옮겨서, 서로 다른 MCP 서버 여러 개를 연결하고 조합해 봅니다. 이번 실습은 바이브 코딩으로 진행해요. 미리 준비된 파일시스템, Git, 시간 서버를 각각 연결하고, 서버마다 실행 방법과 접근 권한을 정합니다. 연결한 다음에는 서버마다 도구 목록과 호출 결과가 어떻게 다른지 견줘 보겠습니다. 그리고 파일을 읽고, Git의 변경 기록을 확인하고, 시간 정보를 확인하는 일을 한 요청으로 이어서 불러요. 그 조합 결과가 이 실습에서 남는 산출물입니다. 성공 기준은 연결 방식의 차이를 설명하는 거예요. HYD 포털에는 방금 배운 등록·검사 절차가 있습니다. 로컬 코딩 도구에서는 해당 도구가 제공하는 서버 설정과 실행 권한을 확인해야 합니다. 이 차이를 설명할 수 있으면 됩니다. 서버별 결과가 한 요청 안에서 어떻게 사용됐는지도 호출 기록으로 남기겠습니다.</a:t>
             </a:r>
           </a:p>
         </p:txBody>
@@ -4493,7 +4493,7 @@
           <a:lstStyle/>
           <a:p>
             <a:r>
-              <a:t>세 번째 실습은 회의록 스킬 작성입니다. 앞의 두 활동이 도구 연결을 확인하는 실습이라면, 세 번째 실습에서는 이번 회차의 다른 한 축인 스킬로 돌아가서, 회의 내용을 후속 업무로 바꾸는 스킬을 직접 써 봅니다. 예제 회의록을 입력으로 받아서, 결정사항, 담당자, 완료 시점을 뽑아내는 SKILL.md예요. 앞에서 카드 네 장으로 정리한, 스킬을 쓸 때 지킬 네 가지를 그대로 쓰면 됩니다. 언제 쓰는 스킬인지 설명 한 줄로 밝히고, 절차와 결과 항목의 이름을 정하세요. 예외 지침도 꼭 넣습니다. 담당자나 기한이 회의록에 없으면, 지어내지 말고 「미정」으로 표시하게 하는 거예요. 그 스킬로 Markdown과 JSON 작업 목록을 만들면, 그 목록이 산출물로 남습니다. 성공 기준은 넷째 카드에 적었어요. 요약에서 끝나지 않고 누가 언제까지 무엇을 하는지가 항목마다 남고, 항목마다 회의록 원문의 근거 문장이 있으면 성공입니다. 같은 안건이 반복되거나 표현이 다르다고 함부로 합치지 말고, 같은 일인지 판단한 근거와 불확실한 부분을 남깁니다. 작업 목록을 만드는 것과 실제 담당자에게 업무를 발송하는 것도 구분하세요. 이번 활동은 목록을 만들고 원문과 대조하는 데까지입니다.</a:t>
+              <a:t>세 번째 실습은 회의록 스킬 작성입니다. 앞의 두 활동이 도구 연결을 확인하는 실습이라면, 세 번째 실습에서는 이번 회차의 다른 한 축인 스킬로 돌아가서, 회의 내용을 후속 업무로 바꾸는 스킬을 직접 써 봅니다. 예제 회의록을 입력으로 받아서, 결정사항, 담당자, 완료 시점을 뽑아내는 SKILL.md예요. 앞에서 카드 네 장으로 정리한, 스킬을 쓸 때 지킬 네 가지를 그대로 쓰면 됩니다. 언제 쓰는 스킬인지 설명 한 줄로 밝히고, 절차와 결과 항목의 이름을 정하겠습니다. 예외 지침도 꼭 넣습니다. 담당자나 기한이 회의록에 없으면, 지어내지 말고 「미정」으로 표시하게 하는 거예요. 그 스킬로 Markdown과 JSON 작업 목록을 만들면, 그 목록이 산출물로 남습니다. 성공 기준은 넷째 카드에 적었어요. 요약에서 끝나지 않고 누가 언제까지 무엇을 하는지가 항목마다 남고, 항목마다 회의록 원문의 근거 문장이 있으면 성공입니다. 같은 안건이 반복되거나 표현이 다르다고 함부로 합치지 말고, 같은 일인지 판단한 근거와 불확실한 부분을 남깁니다. 작업 목록을 만드는 것과 실제 담당자에게 업무를 발송하는 것도 구분하겠습니다. 이번 활동은 목록을 만들고 원문과 대조하는 데까지입니다.</a:t>
             </a:r>
           </a:p>
         </p:txBody>
@@ -4563,7 +4563,7 @@
           <a:lstStyle/>
           <a:p>
             <a:r>
-              <a:t>마지막 실습은 학습 코치입니다. 회의록 활동의 성공 기준으로 항목마다 원문 근거를 붙인다고 했죠. 네 번째 실습에서도 근거를 붙인다는 그 원칙을 그대로 가져가서, 대화형 학습 코치를 만듭니다. 첫 카드가 입력이에요. Notion 학습노트를 Markdown으로 내보낸 파일이나, 제공된 매뉴얼입니다. 둘째 카드가 대화의 차례고요. 입력에서 문항을 만들고, 학생의 답을 받고, 그 답에 정답과 출처를 붙여 되짚어 준 뒤, 다음 문항으로 넘어갑니다. 텍스트 파일을 읽는 방식으로 이 대화를 끝까지 완주하면, 셋째 카드의 산출물인 완주한 대화가 남아요. 피드백마다 정답과 원문의 자리를 붙이고, 실제로 그 원문이 판단을 뒷받침하는지 확인하면 됩니다. 출처 이름만 붙었다고 피드백이 옳은 것은 아니에요. 자료만으로 정답을 정할 수 없다면 그 한계도 밝혀야 합니다. 학습노트는 내보낸 파일로 사용하므로 실서비스 API 연결이 필수는 아닙니다. 네 실습에서 할 일과 남길 결과를 모두 살펴봤습니다. 다음 시간에는 안내한 순서대로 실제 도구를 연결하고 지침을 작성해 보겠습니다. 실습 뒤에는 결과를 바탕으로 복습과 퀴즈를 이어갑니다.</a:t>
+              <a:t>마지막 실습은 학습 코치입니다. 회의록 활동의 성공 기준으로 항목마다 원문 근거를 붙인다고 했죠. 네 번째 실습에서도 근거를 붙인다는 그 원칙을 그대로 가져가서, 대화형 학습 코치를 만듭니다. 첫 카드가 입력이에요. Notion 학습노트를 Markdown으로 내보낸 파일이나, 제공된 매뉴얼입니다. 둘째 카드가 대화의 차례고요. 입력에서 문항을 만들고, 학생의 답을 받고, 그 답에 정답과 출처를 붙여 되짚어 준 뒤, 다음 문항으로 넘어갑니다. 텍스트 파일을 읽는 방식으로 이 대화를 끝까지 완주하면, 셋째 카드의 산출물인 완주한 대화가 남아요. 피드백마다 정답과 원문의 자리를 붙이고, 실제로 그 원문이 판단을 뒷받침하는지 확인하면 됩니다. 출처 이름만 붙었다고 피드백이 옳은 것은 아니에요. 자료만으로 정답을 정할 수 없다면 그 한계도 밝혀야 합니다. 학습노트는 내보낸 파일로 사용하므로 실서비스 API 연결이 필수는 아닙니다. 네 실습에서 할 일과 남길 결과를 모두 살펴봤습니다. 이제 안내한 순서대로 실제 도구를 연결하고 지침을 작성해 보겠습니다. 실습 뒤에는 결과를 바탕으로 복습과 퀴즈를 이어갑니다.</a:t>
             </a:r>
           </a:p>
         </p:txBody>
@@ -5078,6 +5078,76 @@
 </p:notes>
 </file>
 
+<file path=ppt/notesSlides/notesSlide69.xml><?xml version="1.0" encoding="utf-8"?>
+<p:notes xmlns:a="http://schemas.openxmlformats.org/drawingml/2006/main" xmlns:p="http://schemas.openxmlformats.org/presentationml/2006/main" xmlns:r="http://schemas.openxmlformats.org/officeDocument/2006/relationships">
+  <p:cSld>
+    <p:spTree>
+      <p:nvGrpSpPr>
+        <p:cNvPr id="1" name=""/>
+        <p:cNvGrpSpPr/>
+        <p:nvPr/>
+      </p:nvGrpSpPr>
+      <p:grpSpPr>
+        <a:xfrm>
+          <a:off x="0" y="0"/>
+          <a:ext cx="0" cy="0"/>
+          <a:chOff x="0" y="0"/>
+          <a:chExt cx="0" cy="0"/>
+        </a:xfrm>
+      </p:grpSpPr>
+      <p:sp>
+        <p:nvSpPr>
+          <p:cNvPr id="2" name="Slide Image Placeholder 1"/>
+          <p:cNvSpPr>
+            <a:spLocks noGrp="1"/>
+          </p:cNvSpPr>
+          <p:nvPr>
+            <p:ph type="sldImg" idx="2"/>
+          </p:nvPr>
+        </p:nvSpPr>
+        <p:spPr/>
+      </p:sp>
+      <p:sp>
+        <p:nvSpPr>
+          <p:cNvPr id="3" name="Notes Placeholder 2"/>
+          <p:cNvSpPr>
+            <a:spLocks noGrp="1"/>
+          </p:cNvSpPr>
+          <p:nvPr>
+            <p:ph type="body" idx="3" sz="quarter"/>
+          </p:nvPr>
+        </p:nvSpPr>
+        <p:spPr/>
+        <p:txBody>
+          <a:bodyPr/>
+          <a:lstStyle/>
+          <a:p>
+            <a:r>
+              <a:t>58~59장 통합 발화는 58장 발표자 노트를 따른다.</a:t>
+            </a:r>
+          </a:p>
+        </p:txBody>
+      </p:sp>
+      <p:sp>
+        <p:nvSpPr>
+          <p:cNvPr id="4" name="Slide Number Placeholder 3"/>
+          <p:cNvSpPr>
+            <a:spLocks noGrp="1"/>
+          </p:cNvSpPr>
+          <p:nvPr>
+            <p:ph type="sldNum" idx="5" sz="quarter"/>
+          </p:nvPr>
+        </p:nvSpPr>
+        <p:spPr/>
+      </p:sp>
+    </p:spTree>
+  </p:cSld>
+  <p:clrMapOvr>
+    <a:masterClrMapping/>
+  </p:clrMapOvr>
+</p:notes>
+</file>
+
 <file path=ppt/notesSlides/notesSlide7.xml><?xml version="1.0" encoding="utf-8"?>
 <p:notes xmlns:a="http://schemas.openxmlformats.org/drawingml/2006/main" xmlns:p="http://schemas.openxmlformats.org/presentationml/2006/main" xmlns:r="http://schemas.openxmlformats.org/officeDocument/2006/relationships">
   <p:cSld>
@@ -5123,7 +5193,217 @@
           <a:lstStyle/>
           <a:p>
             <a:r>
-              <a:t>이렇게 적어 둔 지침을 에이전트 스킬이라고 부릅니다. 화면 첫 줄의 정의를 보세요. 특정한 일을 수행하는 방법을, 이름을 붙여 적어 둔 지침 묶음이에요. 앞 회차에서 에이전트 하나를 정하는 항목으로 목표, 도구, 업무 지침 셋을 봤습니다. 그때 업무 지침은 에이전트 스킬이라는 파일로 준다고만 하고 넘어갔죠. 이번 시간에 그 파일을 제대로 열어 봅니다. 이 정의에서 중요한 말은 「이름」입니다. 이름이 있어야 같은 일이 다시 왔을 때 그 지침을 꺼내 쓸 수 있거든요. 한 번 적고 버리는 메모가 아니라, 여러 실행에 되풀이해서 쓰는 지침이라는 뜻이죠. 둘째 줄은 파일입니다. 중심 파일은 SKILL.md, 스킬 문서입니다. 스킬 이름과 같은 폴더 안에 놓이고, 이름과 설명을 적은 머리말, 수행 방법을 적은 본문으로 이루어져요. 필요하면 참고 문서나 실행 스크립트를 같은 묶음에 둘 수도 있습니다. 이 수업의 HYD 사례에서는 중심 지침 파일부터 읽겠습니다. 셋째 줄이 실제 예예요. 쿨러 성능 저하 경보에 쓰는 HYD의 스킬은 냉각 긴급 대응이라는 뜻의 이름을 갖고 있습니다. 경보가 다시 오면 에이전트는 이 이름으로 같은 지침을 꺼내 읽습니다. [출처·낭독 제외] https://agentskills.io/specification</a:t>
+              <a:t>이렇게 적어 둔 지침을 에이전트 스킬이라고 부릅니다. 화면 첫 줄의 정의를 보세요. 특정한 일을 수행하는 방법을, 이름을 붙여 적어 둔 지침 묶음이에요. 앞 회차에서 에이전트 하나를 정하는 항목으로 목표, 도구, 업무 지침 셋을 봤습니다. 그때 업무 지침은 에이전트 스킬이라는 파일로 준다고만 하고 넘어갔죠. 이번 시간에 그 파일을 제대로 열어 봅니다. 이 정의에서 중요한 말은 「이름」입니다. 이름이 있어야 같은 일이 다시 왔을 때 그 지침을 꺼내 쓸 수 있거든요. 한 번 적고 버리는 메모가 아니라, 여러 실행에 되풀이해서 쓰는 지침이라는 뜻이죠. 둘째 줄은 파일입니다. 중심 파일은 SKILL.md, 스킬 문서입니다. 스킬 이름과 같은 폴더 안에 놓이고, 이름과 설명을 적은 머리말, 수행 방법을 적은 본문으로 이루어져요. 필요하면 참고 문서나 실행 스크립트를 같은 묶음에 둘 수도 있습니다. 이 수업의 HYD 사례에서는 중심 지침 파일부터 읽겠습니다. 셋째 줄이 실제 예예요. 쿨러 성능 저하 경보에 쓰는 HYD의 스킬은 냉각 긴급 대응이라는 뜻의 이름을 갖고 있습니다. 경보가 다시 오면 에이전트는 이 이름으로 같은 지침을 꺼내 읽습니다.</a:t>
+            </a:r>
+          </a:p>
+        </p:txBody>
+      </p:sp>
+      <p:sp>
+        <p:nvSpPr>
+          <p:cNvPr id="4" name="Slide Number Placeholder 3"/>
+          <p:cNvSpPr>
+            <a:spLocks noGrp="1"/>
+          </p:cNvSpPr>
+          <p:nvPr>
+            <p:ph type="sldNum" idx="5" sz="quarter"/>
+          </p:nvPr>
+        </p:nvSpPr>
+        <p:spPr/>
+      </p:sp>
+    </p:spTree>
+  </p:cSld>
+  <p:clrMapOvr>
+    <a:masterClrMapping/>
+  </p:clrMapOvr>
+</p:notes>
+</file>
+
+<file path=ppt/notesSlides/notesSlide70.xml><?xml version="1.0" encoding="utf-8"?>
+<p:notes xmlns:a="http://schemas.openxmlformats.org/drawingml/2006/main" xmlns:p="http://schemas.openxmlformats.org/presentationml/2006/main" xmlns:r="http://schemas.openxmlformats.org/officeDocument/2006/relationships">
+  <p:cSld>
+    <p:spTree>
+      <p:nvGrpSpPr>
+        <p:cNvPr id="1" name=""/>
+        <p:cNvGrpSpPr/>
+        <p:nvPr/>
+      </p:nvGrpSpPr>
+      <p:grpSpPr>
+        <a:xfrm>
+          <a:off x="0" y="0"/>
+          <a:ext cx="0" cy="0"/>
+          <a:chOff x="0" y="0"/>
+          <a:chExt cx="0" cy="0"/>
+        </a:xfrm>
+      </p:grpSpPr>
+      <p:sp>
+        <p:nvSpPr>
+          <p:cNvPr id="2" name="Slide Image Placeholder 1"/>
+          <p:cNvSpPr>
+            <a:spLocks noGrp="1"/>
+          </p:cNvSpPr>
+          <p:nvPr>
+            <p:ph type="sldImg" idx="2"/>
+          </p:nvPr>
+        </p:nvSpPr>
+        <p:spPr/>
+      </p:sp>
+      <p:sp>
+        <p:nvSpPr>
+          <p:cNvPr id="3" name="Notes Placeholder 2"/>
+          <p:cNvSpPr>
+            <a:spLocks noGrp="1"/>
+          </p:cNvSpPr>
+          <p:nvPr>
+            <p:ph type="body" idx="3" sz="quarter"/>
+          </p:nvPr>
+        </p:nvSpPr>
+        <p:spPr/>
+        <p:txBody>
+          <a:bodyPr/>
+          <a:lstStyle/>
+          <a:p>
+            <a:r>
+              <a:t>60~61장 통합 발화는 60장 발표자 노트를 따른다.</a:t>
+            </a:r>
+          </a:p>
+        </p:txBody>
+      </p:sp>
+      <p:sp>
+        <p:nvSpPr>
+          <p:cNvPr id="4" name="Slide Number Placeholder 3"/>
+          <p:cNvSpPr>
+            <a:spLocks noGrp="1"/>
+          </p:cNvSpPr>
+          <p:nvPr>
+            <p:ph type="sldNum" idx="5" sz="quarter"/>
+          </p:nvPr>
+        </p:nvSpPr>
+        <p:spPr/>
+      </p:sp>
+    </p:spTree>
+  </p:cSld>
+  <p:clrMapOvr>
+    <a:masterClrMapping/>
+  </p:clrMapOvr>
+</p:notes>
+</file>
+
+<file path=ppt/notesSlides/notesSlide71.xml><?xml version="1.0" encoding="utf-8"?>
+<p:notes xmlns:a="http://schemas.openxmlformats.org/drawingml/2006/main" xmlns:p="http://schemas.openxmlformats.org/presentationml/2006/main" xmlns:r="http://schemas.openxmlformats.org/officeDocument/2006/relationships">
+  <p:cSld>
+    <p:spTree>
+      <p:nvGrpSpPr>
+        <p:cNvPr id="1" name=""/>
+        <p:cNvGrpSpPr/>
+        <p:nvPr/>
+      </p:nvGrpSpPr>
+      <p:grpSpPr>
+        <a:xfrm>
+          <a:off x="0" y="0"/>
+          <a:ext cx="0" cy="0"/>
+          <a:chOff x="0" y="0"/>
+          <a:chExt cx="0" cy="0"/>
+        </a:xfrm>
+      </p:grpSpPr>
+      <p:sp>
+        <p:nvSpPr>
+          <p:cNvPr id="2" name="Slide Image Placeholder 1"/>
+          <p:cNvSpPr>
+            <a:spLocks noGrp="1"/>
+          </p:cNvSpPr>
+          <p:nvPr>
+            <p:ph type="sldImg" idx="2"/>
+          </p:nvPr>
+        </p:nvSpPr>
+        <p:spPr/>
+      </p:sp>
+      <p:sp>
+        <p:nvSpPr>
+          <p:cNvPr id="3" name="Notes Placeholder 2"/>
+          <p:cNvSpPr>
+            <a:spLocks noGrp="1"/>
+          </p:cNvSpPr>
+          <p:nvPr>
+            <p:ph type="body" idx="3" sz="quarter"/>
+          </p:nvPr>
+        </p:nvSpPr>
+        <p:spPr/>
+        <p:txBody>
+          <a:bodyPr/>
+          <a:lstStyle/>
+          <a:p>
+            <a:r>
+              <a:t>62~63장 통합 발화는 62장 발표자 노트를 따른다.</a:t>
+            </a:r>
+          </a:p>
+        </p:txBody>
+      </p:sp>
+      <p:sp>
+        <p:nvSpPr>
+          <p:cNvPr id="4" name="Slide Number Placeholder 3"/>
+          <p:cNvSpPr>
+            <a:spLocks noGrp="1"/>
+          </p:cNvSpPr>
+          <p:nvPr>
+            <p:ph type="sldNum" idx="5" sz="quarter"/>
+          </p:nvPr>
+        </p:nvSpPr>
+        <p:spPr/>
+      </p:sp>
+    </p:spTree>
+  </p:cSld>
+  <p:clrMapOvr>
+    <a:masterClrMapping/>
+  </p:clrMapOvr>
+</p:notes>
+</file>
+
+<file path=ppt/notesSlides/notesSlide72.xml><?xml version="1.0" encoding="utf-8"?>
+<p:notes xmlns:a="http://schemas.openxmlformats.org/drawingml/2006/main" xmlns:p="http://schemas.openxmlformats.org/presentationml/2006/main" xmlns:r="http://schemas.openxmlformats.org/officeDocument/2006/relationships">
+  <p:cSld>
+    <p:spTree>
+      <p:nvGrpSpPr>
+        <p:cNvPr id="1" name=""/>
+        <p:cNvGrpSpPr/>
+        <p:nvPr/>
+      </p:nvGrpSpPr>
+      <p:grpSpPr>
+        <a:xfrm>
+          <a:off x="0" y="0"/>
+          <a:ext cx="0" cy="0"/>
+          <a:chOff x="0" y="0"/>
+          <a:chExt cx="0" cy="0"/>
+        </a:xfrm>
+      </p:grpSpPr>
+      <p:sp>
+        <p:nvSpPr>
+          <p:cNvPr id="2" name="Slide Image Placeholder 1"/>
+          <p:cNvSpPr>
+            <a:spLocks noGrp="1"/>
+          </p:cNvSpPr>
+          <p:nvPr>
+            <p:ph type="sldImg" idx="2"/>
+          </p:nvPr>
+        </p:nvSpPr>
+        <p:spPr/>
+      </p:sp>
+      <p:sp>
+        <p:nvSpPr>
+          <p:cNvPr id="3" name="Notes Placeholder 2"/>
+          <p:cNvSpPr>
+            <a:spLocks noGrp="1"/>
+          </p:cNvSpPr>
+          <p:nvPr>
+            <p:ph type="body" idx="3" sz="quarter"/>
+          </p:nvPr>
+        </p:nvSpPr>
+        <p:spPr/>
+        <p:txBody>
+          <a:bodyPr/>
+          <a:lstStyle/>
+          <a:p>
+            <a:r>
+              <a:t>64~65장 통합 발화는 64장 발표자 노트를 따른다.</a:t>
             </a:r>
           </a:p>
         </p:txBody>
